--- a/docs/webinar/E2E-3/E2E-3-ficha.pptx
+++ b/docs/webinar/E2E-3/E2E-3-ficha.pptx
@@ -108,7 +108,7 @@
   <p:extLst>
     <p:ext uri="{521415D9-36F7-43E2-AB2F-B90AF26B5E84}">
       <p14:sectionLst xmlns:p14="http://schemas.microsoft.com/office/powerpoint/2010/main">
-        <p14:section name="Ficha del taller" id="{f2c6191a-483b-c687-5d5d-7847b9c7e33f}">
+        <p14:section name="Ficha del taller" id="{64b517da-e161-75b7-dad0-28d0ad362049}">
           <p14:sldIdLst>
             <p14:sldId id="256"/>
             <p14:sldId id="257"/>
@@ -862,7 +862,7 @@
                   <a:srgbClr val="696969"/>
                 </a:solidFill>
               </a:rPr>
-              <a:t>pm-method 2.4.0 · Webinar E2E-3 · Ficha del taller</a:t>
+              <a:t>pm-method 2.5.0 · Webinar E2E-3 · Ficha del taller</a:t>
             </a:r>
             <a:endParaRPr lang="en-US" sz="1000" dirty="0"/>
           </a:p>
@@ -1102,7 +1102,7 @@
                   <a:srgbClr val="696969"/>
                 </a:solidFill>
               </a:rPr>
-              <a:t>pm-method 2.4.0 · Webinar E2E-3 · Ficha del taller</a:t>
+              <a:t>pm-method 2.5.0 · Webinar E2E-3 · Ficha del taller</a:t>
             </a:r>
             <a:endParaRPr lang="en-US" sz="1000" dirty="0"/>
           </a:p>
@@ -1535,7 +1535,7 @@
                 <a:ea typeface="Arial" pitchFamily="34" charset="-122"/>
                 <a:cs typeface="Arial" pitchFamily="34" charset="-120"/>
               </a:rPr>
-              <a:t>Taller · 2 clases de 90 minutos · Webinar pm-method 2.4.0 · E2E-3</a:t>
+              <a:t>Taller · 2 clases de 90 minutos · Webinar pm-method 2.5.0 · E2E-3</a:t>
             </a:r>
             <a:endParaRPr lang="en-US" sz="1400" dirty="0"/>
           </a:p>

--- a/docs/webinar/E2E-3/E2E-3-ficha.pptx
+++ b/docs/webinar/E2E-3/E2E-3-ficha.pptx
@@ -108,7 +108,7 @@
   <p:extLst>
     <p:ext uri="{521415D9-36F7-43E2-AB2F-B90AF26B5E84}">
       <p14:sectionLst xmlns:p14="http://schemas.microsoft.com/office/powerpoint/2010/main">
-        <p14:section name="Ficha del taller" id="{64b517da-e161-75b7-dad0-28d0ad362049}">
+        <p14:section name="Ficha del taller" id="{5123bf57-1113-807b-ac02-4a67f072f646}">
           <p14:sldIdLst>
             <p14:sldId id="256"/>
             <p14:sldId id="257"/>
@@ -862,7 +862,7 @@
                   <a:srgbClr val="696969"/>
                 </a:solidFill>
               </a:rPr>
-              <a:t>pm-method 2.5.0 · Webinar E2E-3 · Ficha del taller</a:t>
+              <a:t>pm-method 2.5.1 · Webinar E2E-3 · Ficha del taller</a:t>
             </a:r>
             <a:endParaRPr lang="en-US" sz="1000" dirty="0"/>
           </a:p>
@@ -1102,7 +1102,7 @@
                   <a:srgbClr val="696969"/>
                 </a:solidFill>
               </a:rPr>
-              <a:t>pm-method 2.5.0 · Webinar E2E-3 · Ficha del taller</a:t>
+              <a:t>pm-method 2.5.1 · Webinar E2E-3 · Ficha del taller</a:t>
             </a:r>
             <a:endParaRPr lang="en-US" sz="1000" dirty="0"/>
           </a:p>
@@ -1535,7 +1535,7 @@
                 <a:ea typeface="Arial" pitchFamily="34" charset="-122"/>
                 <a:cs typeface="Arial" pitchFamily="34" charset="-120"/>
               </a:rPr>
-              <a:t>Taller · 2 clases de 90 minutos · Webinar pm-method 2.5.0 · E2E-3</a:t>
+              <a:t>Taller · 2 clases de 90 minutos · Webinar pm-method 2.5.1 · E2E-3</a:t>
             </a:r>
             <a:endParaRPr lang="en-US" sz="1400" dirty="0"/>
           </a:p>
@@ -1969,7 +1969,7 @@
                 <a:ea typeface="Arial" pitchFamily="34" charset="-122"/>
                 <a:cs typeface="Arial" pitchFamily="34" charset="-120"/>
               </a:rPr>
-              <a:t>Distinguir un beneficio del business case de un KR y leer la salud de un KR</a:t>
+              <a:t>Distinguir un beneficio de un KR y elegir la meta de un KR con quien decide en la RACI</a:t>
             </a:r>
             <a:endParaRPr lang="en-US" sz="1600" dirty="0"/>
           </a:p>
@@ -2821,7 +2821,7 @@
                 <a:ea typeface="Arial" pitchFamily="34" charset="-122"/>
                 <a:cs typeface="Arial" pitchFamily="34" charset="-120"/>
               </a:rPr>
-              <a:t>Propone acuerdos y compromisos de una transcripción, con cita y hora</a:t>
+              <a:t>Propone acuerdos de una transcripción y alternativas de una meta, con cita y fuente</a:t>
             </a:r>
             <a:endParaRPr lang="en-US" sz="1600" dirty="0"/>
           </a:p>
@@ -3020,7 +3020,7 @@
                 <a:ea typeface="Arial" pitchFamily="34" charset="-122"/>
                 <a:cs typeface="Arial" pitchFamily="34" charset="-120"/>
               </a:rPr>
-              <a:t>Quien presidió la reunión confirma qué acuerdos se registran</a:t>
+              <a:t>Quien presidió confirma los acuerdos; la A de la RACI elige la meta de un KR</a:t>
             </a:r>
             <a:endParaRPr lang="en-US" sz="1600" dirty="0"/>
           </a:p>
@@ -3664,7 +3664,7 @@
                 <a:ea typeface="Arial" pitchFamily="34" charset="-122"/>
                 <a:cs typeface="Arial" pitchFamily="34" charset="-120"/>
               </a:rPr>
-              <a:t>Plan de compromiso, beneficios, OKR y RACI</a:t>
+              <a:t>Beneficios, OKR, RACI y quién decide la meta de un KR</a:t>
             </a:r>
             <a:endParaRPr lang="en-US" sz="1600" dirty="0"/>
           </a:p>
